--- a/자율실험실_SDL_도식_v5_예시이미지.pptx
+++ b/자율실험실_SDL_도식_v5_예시이미지.pptx
@@ -8220,7 +8220,7 @@
       </p:sp>
       <p:pic>
         <p:nvPicPr>
-          <p:cNvPr id="93" name="예시 이미지 1" descr="AI 실험 설계 예시: AI 추천엔진(신경망) · 과거 실험 데이터베이스 · 가상실험 모델"/>
+          <p:cNvPr id="93" name="예시 이미지 1" descr="AI 실험 설계 예시: AI 추천엔진 · 과거 실험 데이터베이스 · 가상실험 모델"/>
           <p:cNvPicPr>
             <a:picLocks noChangeAspect="1"/>
           </p:cNvPicPr>
@@ -8244,7 +8244,7 @@
       </p:pic>
       <p:pic>
         <p:nvPicPr>
-          <p:cNvPr id="94" name="예시 이미지 2" descr="로봇·장비 실험 수행 예시: 로봇팔 · 액체 핸들러와 웰플레이트 · 측정장비"/>
+          <p:cNvPr id="94" name="예시 이미지 2" descr="로봇·장비 실험 수행 예시: 로봇팔 · 액체 핸들러 · 측정장비"/>
           <p:cNvPicPr>
             <a:picLocks noChangeAspect="1"/>
           </p:cNvPicPr>
@@ -8268,7 +8268,7 @@
       </p:pic>
       <p:pic>
         <p:nvPicPr>
-          <p:cNvPr id="95" name="예시 이미지 3" descr="AI·분석SW 결과분석 예시: 측정데이터 곡선 분석 · 목표 충족여부 자동판정 · 결과 시각화 대시보드"/>
+          <p:cNvPr id="95" name="예시 이미지 3" descr="AI·분석SW 결과분석 예시: 측정데이터 분석 · 목표 충족여부 자동판정 · 결과 시각화 대시보드"/>
           <p:cNvPicPr>
             <a:picLocks noChangeAspect="1"/>
           </p:cNvPicPr>
